--- a/public/fun/pack/pptx/reviewpro/보장점검양식프리미엄_19_부모님점검_레몬크림.pptx
+++ b/public/fun/pack/pptx/reviewpro/보장점검양식프리미엄_19_부모님점검_레몬크림.pptx
@@ -112,12 +112,12 @@
   <p:extLst>
     <p:ext uri="{521415D9-36F7-43E2-AB2F-B90AF26B5E84}">
       <p14:sectionLst xmlns:p14="http://schemas.microsoft.com/office/powerpoint/2010/main">
-        <p14:section name="시작" id="{B019CA64-F093-47E8-B157-2B48D86834D7}">
+        <p14:section name="시작" id="{9271127B-8E0A-4908-8FB0-A1C9112D980B}">
           <p14:sldIdLst>
             <p14:sldId id="256"/>
           </p14:sldIdLst>
         </p14:section>
-        <p14:section name="본문" id="{04E3B685-FA80-48F9-842C-1CECA115F4AC}">
+        <p14:section name="본문" id="{7F218714-8B05-49A2-BA10-E2AFA6EEB156}">
           <p14:sldIdLst>
             <p14:sldId id="257"/>
             <p14:sldId id="258"/>
@@ -1600,7 +1600,7 @@
             </a:lvl1pPr>
           </a:lstStyle>
           <a:p>
-            <a:fld id="{A21F76F6-4000-4046-A806-B0E3C61B4C3B}" type="slidenum">
+            <a:fld id="{C0E5F5BB-AB49-4494-ACF6-43EA24DF7FC7}" type="slidenum">
               <a:rPr lang="en-US"/>
               <a:t>‹#›</a:t>
             </a:fld>
@@ -2302,7 +2302,7 @@
             </a:lvl1pPr>
           </a:lstStyle>
           <a:p>
-            <a:fld id="{02265802-64D5-4B63-BC72-D10DEE2CE16B}" type="slidenum">
+            <a:fld id="{CFE106AE-CF7D-4E84-B96D-0A4A44D709B9}" type="slidenum">
               <a:rPr lang="en-US"/>
               <a:t>‹#›</a:t>
             </a:fld>
@@ -2980,7 +2980,7 @@
             </a:lvl1pPr>
           </a:lstStyle>
           <a:p>
-            <a:fld id="{4EBC691C-7F41-42D4-9616-6DCD753D7165}" type="slidenum">
+            <a:fld id="{6E5B1A54-830C-4B1A-8E84-EDB829057266}" type="slidenum">
               <a:rPr lang="en-US"/>
               <a:t>‹#›</a:t>
             </a:fld>
@@ -3865,7 +3865,7 @@
           <a:p>
             <a:r>
               <a:rPr lang="ko-KR"/>
-              <a:t>부모님 점검 · 0000. 00. 00</a:t>
+              <a:t>부모님 점검 · 날짜 입력</a:t>
             </a:r>
           </a:p>
           <a:p>
@@ -3956,7 +3956,7 @@
           <a:bodyPr/>
           <a:lstStyle/>
           <a:p>
-            <a:fld id="{CA9E4CBF-469B-48A4-B03C-FB56AD61BF7A}" type="slidenum">
+            <a:fld id="{20BF5436-E95C-4AA8-97F9-A5E938E795B8}" type="slidenum">
               <a:rPr lang="en-US"/>
               <a:t>‹#›</a:t>
             </a:fld>
@@ -4669,7 +4669,7 @@
           <a:bodyPr/>
           <a:lstStyle/>
           <a:p>
-            <a:fld id="{364AD87B-4BB6-42E2-8A0B-7F698448CAFD}" type="slidenum">
+            <a:fld id="{8368365D-1DCF-4CD1-B3B7-4FF0F2F08E8E}" type="slidenum">
               <a:rPr lang="en-US"/>
               <a:t>‹#›</a:t>
             </a:fld>
@@ -6175,7 +6175,7 @@
           <a:bodyPr/>
           <a:lstStyle/>
           <a:p>
-            <a:fld id="{635A6321-B29E-4BB2-B4EF-45033057C975}" type="slidenum">
+            <a:fld id="{F69C70F4-6534-4617-9704-198B51318FF7}" type="slidenum">
               <a:rPr lang="en-US"/>
               <a:t>‹#›</a:t>
             </a:fld>
@@ -7725,7 +7725,7 @@
           <a:bodyPr/>
           <a:lstStyle/>
           <a:p>
-            <a:fld id="{6798FB68-F055-4D3D-AA00-2C31065054AE}" type="slidenum">
+            <a:fld id="{338D2D2A-45EA-45E0-A339-59D7A5E09939}" type="slidenum">
               <a:rPr lang="en-US"/>
               <a:t>‹#›</a:t>
             </a:fld>
@@ -8650,7 +8650,7 @@
           <a:bodyPr/>
           <a:lstStyle/>
           <a:p>
-            <a:fld id="{0360DBD7-A8B4-4CF2-BB58-11BD347017F4}" type="slidenum">
+            <a:fld id="{8D350F7C-E6CC-4E04-B7A8-F78AF2A4CB76}" type="slidenum">
               <a:rPr lang="en-US"/>
               <a:t>‹#›</a:t>
             </a:fld>
